--- a/001 Типы языка Си.pptx
+++ b/001 Типы языка Си.pptx
@@ -1,6 +1,6 @@
 
 <file path=ppt/presentation.xml><?xml version="1.0" encoding="utf-8"?>
-<p:presentation xmlns:a="http://schemas.openxmlformats.org/drawingml/2006/main" xmlns:r="http://schemas.openxmlformats.org/officeDocument/2006/relationships" xmlns:p="http://schemas.openxmlformats.org/presentationml/2006/main" saveSubsetFonts="1">
+<p:presentation xmlns:a="http://schemas.openxmlformats.org/drawingml/2006/main" xmlns:r="http://schemas.openxmlformats.org/officeDocument/2006/relationships" xmlns:p="http://schemas.openxmlformats.org/presentationml/2006/main" embedTrueTypeFonts="1" saveSubsetFonts="1">
   <p:sldMasterIdLst>
     <p:sldMasterId id="2147483648" r:id="rId1"/>
   </p:sldMasterIdLst>
@@ -59,6 +59,15 @@
   </p:sldIdLst>
   <p:sldSz cx="12192000" cy="6858000"/>
   <p:notesSz cx="6858000" cy="9144000"/>
+  <p:embeddedFontLst>
+    <p:embeddedFont>
+      <p:font typeface="Consolas" panose="020B0609020204030204" pitchFamily="49" charset="0"/>
+      <p:regular r:id="rId51"/>
+      <p:bold r:id="rId52"/>
+      <p:italic r:id="rId53"/>
+      <p:boldItalic r:id="rId54"/>
+    </p:embeddedFont>
+  </p:embeddedFontLst>
   <p:defaultTextStyle>
     <a:defPPr>
       <a:defRPr lang="ru-RU"/>
@@ -244,7 +253,7 @@
           <a:p>
             <a:fld id="{8E55B237-282A-413C-93C7-161EFC0FDF85}" type="datetimeFigureOut">
               <a:rPr lang="ru-RU" smtClean="0"/>
-              <a:t>03.09.2026</a:t>
+              <a:t>16.09.2026</a:t>
             </a:fld>
             <a:endParaRPr lang="ru-RU"/>
           </a:p>
@@ -997,7 +1006,7 @@
           <a:p>
             <a:fld id="{78E65DD7-7B4A-47A4-8B61-4938D03CC77B}" type="datetimeFigureOut">
               <a:rPr lang="ru-RU" smtClean="0"/>
-              <a:t>03.09.2026</a:t>
+              <a:t>16.09.2026</a:t>
             </a:fld>
             <a:endParaRPr lang="ru-RU"/>
           </a:p>
@@ -1197,7 +1206,7 @@
           <a:p>
             <a:fld id="{78E65DD7-7B4A-47A4-8B61-4938D03CC77B}" type="datetimeFigureOut">
               <a:rPr lang="ru-RU" smtClean="0"/>
-              <a:t>03.09.2026</a:t>
+              <a:t>16.09.2026</a:t>
             </a:fld>
             <a:endParaRPr lang="ru-RU"/>
           </a:p>
@@ -1407,7 +1416,7 @@
           <a:p>
             <a:fld id="{78E65DD7-7B4A-47A4-8B61-4938D03CC77B}" type="datetimeFigureOut">
               <a:rPr lang="ru-RU" smtClean="0"/>
-              <a:t>03.09.2026</a:t>
+              <a:t>16.09.2026</a:t>
             </a:fld>
             <a:endParaRPr lang="ru-RU"/>
           </a:p>
@@ -1607,7 +1616,7 @@
           <a:p>
             <a:fld id="{78E65DD7-7B4A-47A4-8B61-4938D03CC77B}" type="datetimeFigureOut">
               <a:rPr lang="ru-RU" smtClean="0"/>
-              <a:t>03.09.2026</a:t>
+              <a:t>16.09.2026</a:t>
             </a:fld>
             <a:endParaRPr lang="ru-RU"/>
           </a:p>
@@ -1883,7 +1892,7 @@
           <a:p>
             <a:fld id="{78E65DD7-7B4A-47A4-8B61-4938D03CC77B}" type="datetimeFigureOut">
               <a:rPr lang="ru-RU" smtClean="0"/>
-              <a:t>03.09.2026</a:t>
+              <a:t>16.09.2026</a:t>
             </a:fld>
             <a:endParaRPr lang="ru-RU"/>
           </a:p>
@@ -2151,7 +2160,7 @@
           <a:p>
             <a:fld id="{78E65DD7-7B4A-47A4-8B61-4938D03CC77B}" type="datetimeFigureOut">
               <a:rPr lang="ru-RU" smtClean="0"/>
-              <a:t>03.09.2026</a:t>
+              <a:t>16.09.2026</a:t>
             </a:fld>
             <a:endParaRPr lang="ru-RU"/>
           </a:p>
@@ -2566,7 +2575,7 @@
           <a:p>
             <a:fld id="{78E65DD7-7B4A-47A4-8B61-4938D03CC77B}" type="datetimeFigureOut">
               <a:rPr lang="ru-RU" smtClean="0"/>
-              <a:t>03.09.2026</a:t>
+              <a:t>16.09.2026</a:t>
             </a:fld>
             <a:endParaRPr lang="ru-RU"/>
           </a:p>
@@ -2708,7 +2717,7 @@
           <a:p>
             <a:fld id="{78E65DD7-7B4A-47A4-8B61-4938D03CC77B}" type="datetimeFigureOut">
               <a:rPr lang="ru-RU" smtClean="0"/>
-              <a:t>03.09.2026</a:t>
+              <a:t>16.09.2026</a:t>
             </a:fld>
             <a:endParaRPr lang="ru-RU"/>
           </a:p>
@@ -2821,7 +2830,7 @@
           <a:p>
             <a:fld id="{78E65DD7-7B4A-47A4-8B61-4938D03CC77B}" type="datetimeFigureOut">
               <a:rPr lang="ru-RU" smtClean="0"/>
-              <a:t>03.09.2026</a:t>
+              <a:t>16.09.2026</a:t>
             </a:fld>
             <a:endParaRPr lang="ru-RU"/>
           </a:p>
@@ -3134,7 +3143,7 @@
           <a:p>
             <a:fld id="{78E65DD7-7B4A-47A4-8B61-4938D03CC77B}" type="datetimeFigureOut">
               <a:rPr lang="ru-RU" smtClean="0"/>
-              <a:t>03.09.2026</a:t>
+              <a:t>16.09.2026</a:t>
             </a:fld>
             <a:endParaRPr lang="ru-RU"/>
           </a:p>
@@ -3423,7 +3432,7 @@
           <a:p>
             <a:fld id="{78E65DD7-7B4A-47A4-8B61-4938D03CC77B}" type="datetimeFigureOut">
               <a:rPr lang="ru-RU" smtClean="0"/>
-              <a:t>03.09.2026</a:t>
+              <a:t>16.09.2026</a:t>
             </a:fld>
             <a:endParaRPr lang="ru-RU"/>
           </a:p>
@@ -3666,7 +3675,7 @@
           <a:p>
             <a:fld id="{78E65DD7-7B4A-47A4-8B61-4938D03CC77B}" type="datetimeFigureOut">
               <a:rPr lang="ru-RU" smtClean="0"/>
-              <a:t>03.09.2026</a:t>
+              <a:t>16.09.2026</a:t>
             </a:fld>
             <a:endParaRPr lang="ru-RU"/>
           </a:p>
@@ -4132,7 +4141,7 @@
           <a:bodyPr/>
           <a:lstStyle/>
           <a:p>
-            <a:endParaRPr lang="ru-RU"/>
+            <a:endParaRPr lang="ru-RU" dirty="0"/>
           </a:p>
         </p:txBody>
       </p:sp>
@@ -4227,7 +4236,15 @@
             </a:r>
             <a:r>
               <a:rPr lang="ru-RU" dirty="0"/>
-              <a:t> должно храниться по адресу, кратному выравниванию</a:t>
+              <a:t> должно храниться по адресу, кратному </a:t>
+            </a:r>
+            <a:r>
+              <a:rPr lang="ru-RU" dirty="0">
+                <a:highlight>
+                  <a:srgbClr val="00FFFF"/>
+                </a:highlight>
+              </a:rPr>
+              <a:t>выравниванию</a:t>
             </a:r>
             <a:r>
               <a:rPr lang="en-US" dirty="0"/>
@@ -8435,7 +8452,19 @@
             </a:r>
             <a:r>
               <a:rPr lang="ru-RU" sz="4000" dirty="0"/>
-              <a:t>называется полным, если известен</a:t>
+              <a:t>называется </a:t>
+            </a:r>
+            <a:r>
+              <a:rPr lang="ru-RU" sz="4000" dirty="0">
+                <a:highlight>
+                  <a:srgbClr val="00FFFF"/>
+                </a:highlight>
+              </a:rPr>
+              <a:t>полным</a:t>
+            </a:r>
+            <a:r>
+              <a:rPr lang="ru-RU" sz="4000" dirty="0"/>
+              <a:t>, если известен</a:t>
             </a:r>
             <a:r>
               <a:rPr lang="ru-RU" sz="4000" baseline="30000" dirty="0"/>
@@ -8652,15 +8681,21 @@
               <a:t>Арифметика, поразрядные, проверка равенства и порядка, преобразования целое </a:t>
             </a:r>
             <a:r>
-              <a:rPr lang="en-US" dirty="0"/>
+              <a:rPr lang="en-US" dirty="0">
+                <a:latin typeface="Consolas" panose="020B0609020204030204" pitchFamily="49" charset="0"/>
+              </a:rPr>
               <a:t>&lt;</a:t>
             </a:r>
             <a:r>
-              <a:rPr lang="ru-RU" dirty="0"/>
-              <a:t>--</a:t>
-            </a:r>
-            <a:r>
-              <a:rPr lang="en-US" dirty="0"/>
+              <a:rPr lang="ru-RU" dirty="0">
+                <a:latin typeface="Consolas" panose="020B0609020204030204" pitchFamily="49" charset="0"/>
+              </a:rPr>
+              <a:t>-</a:t>
+            </a:r>
+            <a:r>
+              <a:rPr lang="en-US" dirty="0">
+                <a:latin typeface="Consolas" panose="020B0609020204030204" pitchFamily="49" charset="0"/>
+              </a:rPr>
               <a:t>&gt; </a:t>
             </a:r>
             <a:r>
@@ -26855,7 +26890,7 @@
           <a:p>
             <a:r>
               <a:rPr lang="ru-RU" sz="4000" dirty="0"/>
-              <a:t>Список операций выражается через списки операций других типов</a:t>
+              <a:t>Набор операций выражается через наборы операций других типов</a:t>
             </a:r>
           </a:p>
         </p:txBody>
@@ -26953,37 +26988,77 @@
           <a:lstStyle/>
           <a:p>
             <a:r>
+              <a:rPr lang="ru-RU" dirty="0">
+                <a:highlight>
+                  <a:srgbClr val="00FFFF"/>
+                </a:highlight>
+              </a:rPr>
+              <a:t>Тип</a:t>
+            </a:r>
+            <a:r>
+              <a:rPr lang="en-US" dirty="0">
+                <a:highlight>
+                  <a:srgbClr val="00FFFF"/>
+                </a:highlight>
+              </a:rPr>
+              <a:t> </a:t>
+            </a:r>
+            <a:r>
+              <a:rPr lang="ru-RU" dirty="0">
+                <a:highlight>
+                  <a:srgbClr val="00FFFF"/>
+                </a:highlight>
+              </a:rPr>
+              <a:t>данных </a:t>
+            </a:r>
+            <a:r>
               <a:rPr lang="ru-RU" dirty="0"/>
-              <a:t>Тип</a:t>
-            </a:r>
-            <a:r>
-              <a:rPr lang="en-US" dirty="0"/>
-              <a:t> </a:t>
-            </a:r>
+              <a:t>– это множество значений и набор операций над ними</a:t>
+            </a:r>
+          </a:p>
+          <a:p>
+            <a:pPr lvl="1"/>
             <a:r>
               <a:rPr lang="ru-RU" dirty="0"/>
-              <a:t>данных – это множество значений и набор операций над ними</a:t>
+              <a:t>Результат и/или часть аргументов операции могут иметь другой тип</a:t>
+            </a:r>
+          </a:p>
+          <a:p>
+            <a:pPr lvl="2"/>
+            <a:r>
+              <a:rPr lang="ru-RU" dirty="0"/>
+              <a:t>Например, сравнение чисел дает булевский результат</a:t>
             </a:r>
           </a:p>
           <a:p>
             <a:pPr lvl="1"/>
             <a:r>
               <a:rPr lang="ru-RU" dirty="0"/>
-              <a:t>Результат и/или некоторые аргументы операции могут иметь другой тип</a:t>
+              <a:t>Может гарантировать свойства значений и/или операций</a:t>
             </a:r>
           </a:p>
           <a:p>
             <a:pPr lvl="2"/>
             <a:r>
               <a:rPr lang="ru-RU" dirty="0"/>
-              <a:t>Например, сравнение чисел дает булевское значение</a:t>
-            </a:r>
-          </a:p>
-          <a:p>
-            <a:pPr lvl="1"/>
+              <a:t>Например, размер значений в памяти, сложность операций по памяти/времени</a:t>
+            </a:r>
+          </a:p>
+          <a:p>
+            <a:endParaRPr lang="ru-RU" dirty="0"/>
+          </a:p>
+          <a:p>
+            <a:r>
+              <a:rPr lang="ru-RU" dirty="0">
+                <a:highlight>
+                  <a:srgbClr val="00FFFF"/>
+                </a:highlight>
+              </a:rPr>
+              <a:t>Система типов </a:t>
+            </a:r>
             <a:r>
               <a:rPr lang="ru-RU" dirty="0"/>
-              <a:t>Может частично задавать способ хранения значений в памяти и/или реализацию операций – точность, сложность по памяти/времени и т.п.</a:t>
+              <a:t>языка программирования – это множество всех типов, которые можно описать на этом языке</a:t>
             </a:r>
           </a:p>
           <a:p>
@@ -26991,17 +27066,16 @@
           </a:p>
           <a:p>
             <a:r>
+              <a:rPr lang="ru-RU" dirty="0">
+                <a:highlight>
+                  <a:srgbClr val="00FFFF"/>
+                </a:highlight>
+              </a:rPr>
+              <a:t>Типизация</a:t>
+            </a:r>
+            <a:r>
               <a:rPr lang="ru-RU" dirty="0"/>
-              <a:t>Система типов языка программирования – это множество всех типов, которые можно описать на этом языке</a:t>
-            </a:r>
-          </a:p>
-          <a:p>
-            <a:endParaRPr lang="ru-RU" dirty="0"/>
-          </a:p>
-          <a:p>
-            <a:r>
-              <a:rPr lang="ru-RU" dirty="0"/>
-              <a:t>Типизация языка программирования -- это набор правил, которые назначают типы переменным, выражениям, функциям и т.п. частям программы на этом языке</a:t>
+              <a:t> языка программирования -- это набор правил, которые назначают типы переменным, выражениям, функциям и т.п. частям программы на этом языке</a:t>
             </a:r>
           </a:p>
         </p:txBody>
@@ -27221,7 +27295,15 @@
             </a:r>
             <a:r>
               <a:rPr lang="ru-RU" dirty="0"/>
-              <a:t>называется тэгом перечислимого типа</a:t>
+              <a:t>называется </a:t>
+            </a:r>
+            <a:r>
+              <a:rPr lang="ru-RU" dirty="0">
+                <a:highlight>
+                  <a:srgbClr val="00FFFF"/>
+                </a:highlight>
+              </a:rPr>
+              <a:t>тэгом перечислимого типа</a:t>
             </a:r>
           </a:p>
         </p:txBody>
@@ -28967,7 +29049,7 @@
         <p:spPr/>
         <p:txBody>
           <a:bodyPr>
-            <a:normAutofit fontScale="92500" lnSpcReduction="10000"/>
+            <a:normAutofit fontScale="85000" lnSpcReduction="20000"/>
           </a:bodyPr>
           <a:lstStyle/>
           <a:p>
@@ -29042,6 +29124,7 @@
             <a:endParaRPr lang="ru-RU" dirty="0"/>
           </a:p>
           <a:p>
+            <a:pPr lvl="1"/>
             <a:endParaRPr lang="ru-RU" dirty="0"/>
           </a:p>
           <a:p>
@@ -29193,6 +29276,7 @@
             <a:endParaRPr lang="ru-RU" baseline="-25000" dirty="0"/>
           </a:p>
           <a:p>
+            <a:pPr lvl="1"/>
             <a:endParaRPr lang="ru-RU" dirty="0"/>
           </a:p>
           <a:p>
@@ -29303,12 +29387,38 @@
               </a:rPr>
               <a:t>}</a:t>
             </a:r>
-            <a:endParaRPr lang="ru-RU" dirty="0">
-              <a:latin typeface="Consolas" panose="020B0609020204030204" pitchFamily="49" charset="0"/>
-            </a:endParaRPr>
-          </a:p>
-          <a:p>
+          </a:p>
+          <a:p>
+            <a:pPr lvl="1"/>
             <a:endParaRPr lang="ru-RU" dirty="0"/>
+          </a:p>
+          <a:p>
+            <a:r>
+              <a:rPr lang="ru-RU" dirty="0"/>
+              <a:t>Идентификатор после ключевого слова </a:t>
+            </a:r>
+            <a:r>
+              <a:rPr lang="en-US" dirty="0">
+                <a:latin typeface="Consolas" panose="020B0609020204030204" pitchFamily="49" charset="0"/>
+              </a:rPr>
+              <a:t>struct</a:t>
+            </a:r>
+            <a:r>
+              <a:rPr lang="en-US" dirty="0"/>
+              <a:t> </a:t>
+            </a:r>
+            <a:r>
+              <a:rPr lang="ru-RU" dirty="0"/>
+              <a:t>называется </a:t>
+            </a:r>
+            <a:r>
+              <a:rPr lang="ru-RU" dirty="0">
+                <a:highlight>
+                  <a:srgbClr val="00FFFF"/>
+                </a:highlight>
+              </a:rPr>
+              <a:t>тэгом структуры</a:t>
+            </a:r>
           </a:p>
         </p:txBody>
       </p:sp>
@@ -31822,7 +31932,7 @@
         <p:spPr/>
         <p:txBody>
           <a:bodyPr>
-            <a:normAutofit/>
+            <a:normAutofit fontScale="92500" lnSpcReduction="20000"/>
           </a:bodyPr>
           <a:lstStyle/>
           <a:p>
@@ -31861,6 +31971,7 @@
             <a:endParaRPr lang="ru-RU" dirty="0"/>
           </a:p>
           <a:p>
+            <a:pPr lvl="1"/>
             <a:endParaRPr lang="ru-RU" dirty="0"/>
           </a:p>
           <a:p>
@@ -32008,6 +32119,7 @@
             <a:endParaRPr lang="ru-RU" baseline="-25000" dirty="0"/>
           </a:p>
           <a:p>
+            <a:pPr lvl="1"/>
             <a:endParaRPr lang="ru-RU" dirty="0"/>
           </a:p>
           <a:p>
@@ -32050,6 +32162,40 @@
               <a:rPr lang="ru-RU" dirty="0"/>
               <a:t>полные типы</a:t>
             </a:r>
+          </a:p>
+          <a:p>
+            <a:pPr lvl="1"/>
+            <a:endParaRPr lang="ru-RU" dirty="0"/>
+          </a:p>
+          <a:p>
+            <a:r>
+              <a:rPr lang="ru-RU" dirty="0"/>
+              <a:t>Идентификатор после ключевого слова </a:t>
+            </a:r>
+            <a:r>
+              <a:rPr lang="en-US" dirty="0">
+                <a:latin typeface="Consolas" panose="020B0609020204030204" pitchFamily="49" charset="0"/>
+              </a:rPr>
+              <a:t>union</a:t>
+            </a:r>
+            <a:r>
+              <a:rPr lang="en-US" dirty="0"/>
+              <a:t> </a:t>
+            </a:r>
+            <a:r>
+              <a:rPr lang="ru-RU" dirty="0"/>
+              <a:t>называется </a:t>
+            </a:r>
+            <a:r>
+              <a:rPr lang="ru-RU" dirty="0">
+                <a:highlight>
+                  <a:srgbClr val="00FFFF"/>
+                </a:highlight>
+              </a:rPr>
+              <a:t>тэгом объединения</a:t>
+            </a:r>
+          </a:p>
+          <a:p>
             <a:endParaRPr lang="ru-RU" dirty="0">
               <a:latin typeface="Consolas" panose="020B0609020204030204" pitchFamily="49" charset="0"/>
             </a:endParaRPr>
@@ -32715,7 +32861,27 @@
                 <a:effectLst/>
                 <a:latin typeface="Consolas" panose="020B0609020204030204" pitchFamily="49" charset="0"/>
               </a:rPr>
-              <a:t>массив типа объединение из 3 элементов</a:t>
+              <a:t>массив типа </a:t>
+            </a:r>
+            <a:r>
+              <a:rPr lang="en-US" sz="2000" b="0" dirty="0">
+                <a:solidFill>
+                  <a:srgbClr val="6A9955"/>
+                </a:solidFill>
+                <a:effectLst/>
+                <a:latin typeface="Consolas" panose="020B0609020204030204" pitchFamily="49" charset="0"/>
+              </a:rPr>
+              <a:t>union Figure </a:t>
+            </a:r>
+            <a:r>
+              <a:rPr lang="ru-RU" sz="2000" b="0" dirty="0">
+                <a:solidFill>
+                  <a:srgbClr val="6A9955"/>
+                </a:solidFill>
+                <a:effectLst/>
+                <a:latin typeface="Consolas" panose="020B0609020204030204" pitchFamily="49" charset="0"/>
+              </a:rPr>
+              <a:t>из 3 элементов</a:t>
             </a:r>
             <a:endParaRPr lang="ru-RU" sz="2000" b="0" dirty="0">
               <a:solidFill>
@@ -32807,7 +32973,7 @@
                 <a:effectLst/>
                 <a:latin typeface="Consolas" panose="020B0609020204030204" pitchFamily="49" charset="0"/>
               </a:rPr>
-              <a:t>union </a:t>
+              <a:t>union Figure </a:t>
             </a:r>
             <a:r>
               <a:rPr lang="ru-RU" sz="2000" b="0" dirty="0">
@@ -32912,7 +33078,7 @@
                 <a:effectLst/>
                 <a:latin typeface="Consolas" panose="020B0609020204030204" pitchFamily="49" charset="0"/>
               </a:rPr>
-              <a:t>union </a:t>
+              <a:t>union Figure </a:t>
             </a:r>
             <a:r>
               <a:rPr lang="ru-RU" sz="2000" b="0" dirty="0">
@@ -33101,9 +33267,9 @@
             <a:pPr lvl="1"/>
             <a:r>
               <a:rPr lang="ru-RU" b="1" dirty="0">
-                <a:solidFill>
-                  <a:schemeClr val="accent4"/>
-                </a:solidFill>
+                <a:highlight>
+                  <a:srgbClr val="00FFFF"/>
+                </a:highlight>
               </a:rPr>
               <a:t>Си</a:t>
             </a:r>
@@ -33129,9 +33295,9 @@
             </a:br>
             <a:r>
               <a:rPr lang="en-US" b="1" dirty="0">
-                <a:solidFill>
-                  <a:schemeClr val="accent5"/>
-                </a:solidFill>
+                <a:highlight>
+                  <a:srgbClr val="808080"/>
+                </a:highlight>
               </a:rPr>
               <a:t>Python</a:t>
             </a:r>
@@ -33163,9 +33329,9 @@
             <a:pPr lvl="1"/>
             <a:r>
               <a:rPr lang="ru-RU" b="1" dirty="0">
-                <a:solidFill>
-                  <a:schemeClr val="accent4"/>
-                </a:solidFill>
+                <a:highlight>
+                  <a:srgbClr val="00FFFF"/>
+                </a:highlight>
               </a:rPr>
               <a:t>Си</a:t>
             </a:r>
@@ -33215,9 +33381,9 @@
             <a:pPr lvl="1"/>
             <a:r>
               <a:rPr lang="en-US" b="1" dirty="0">
-                <a:solidFill>
-                  <a:schemeClr val="accent5"/>
-                </a:solidFill>
+                <a:highlight>
+                  <a:srgbClr val="808080"/>
+                </a:highlight>
               </a:rPr>
               <a:t>Python</a:t>
             </a:r>
@@ -33245,9 +33411,9 @@
             <a:pPr lvl="1"/>
             <a:r>
               <a:rPr lang="ru-RU" b="1" dirty="0">
-                <a:solidFill>
-                  <a:schemeClr val="accent4"/>
-                </a:solidFill>
+                <a:highlight>
+                  <a:srgbClr val="00FFFF"/>
+                </a:highlight>
               </a:rPr>
               <a:t>Си</a:t>
             </a:r>
@@ -33274,9 +33440,9 @@
             <a:pPr lvl="1"/>
             <a:r>
               <a:rPr lang="en-US" b="1" dirty="0">
-                <a:solidFill>
-                  <a:schemeClr val="accent5"/>
-                </a:solidFill>
+                <a:highlight>
+                  <a:srgbClr val="808080"/>
+                </a:highlight>
               </a:rPr>
               <a:t>Python</a:t>
             </a:r>
@@ -33830,7 +33996,7 @@
         <p:spPr/>
         <p:txBody>
           <a:bodyPr>
-            <a:normAutofit fontScale="85000" lnSpcReduction="20000"/>
+            <a:normAutofit fontScale="77500" lnSpcReduction="20000"/>
           </a:bodyPr>
           <a:lstStyle/>
           <a:p>
@@ -34149,20 +34315,42 @@
               <a:t>, </a:t>
             </a:r>
             <a:r>
+              <a:rPr lang="en-US" sz="2000" dirty="0" err="1">
+                <a:highlight>
+                  <a:srgbClr val="C0C0C0"/>
+                </a:highlight>
+                <a:latin typeface="Consolas" panose="020B0609020204030204" pitchFamily="49" charset="0"/>
+              </a:rPr>
+              <a:t>va_list</a:t>
+            </a:r>
+            <a:r>
               <a:rPr lang="en-US" dirty="0"/>
-              <a:t>Any) -&gt; T, </a:t>
+              <a:t>) -&gt; T, </a:t>
             </a:r>
             <a:r>
               <a:rPr lang="ru-RU" dirty="0"/>
               <a:t>где </a:t>
             </a:r>
             <a:r>
+              <a:rPr lang="en-US" sz="2000" dirty="0" err="1">
+                <a:highlight>
+                  <a:srgbClr val="C0C0C0"/>
+                </a:highlight>
+                <a:latin typeface="Consolas" panose="020B0609020204030204" pitchFamily="49" charset="0"/>
+              </a:rPr>
+              <a:t>va_list</a:t>
+            </a:r>
+            <a:r>
               <a:rPr lang="en-US" dirty="0"/>
-              <a:t>Any – </a:t>
+              <a:t> – implementation defined </a:t>
             </a:r>
             <a:r>
               <a:rPr lang="ru-RU" dirty="0"/>
-              <a:t>множество кортежей значений произвольных типов</a:t>
+              <a:t>тип «список значений произвольных типов» из </a:t>
+            </a:r>
+            <a:r>
+              <a:rPr lang="ru-RU" dirty="0" err="1"/>
+              <a:t>stdarg.h</a:t>
             </a:r>
             <a:endParaRPr lang="en-US" dirty="0"/>
           </a:p>
@@ -34222,9 +34410,35 @@
             </a:r>
             <a:r>
               <a:rPr lang="ru-RU" dirty="0"/>
-              <a:t>произвольный тип</a:t>
+              <a:t>произвольные типы</a:t>
             </a:r>
             <a:endParaRPr lang="ru-RU" baseline="-25000" dirty="0"/>
+          </a:p>
+          <a:p>
+            <a:pPr lvl="1"/>
+            <a:r>
+              <a:rPr lang="ru-RU" dirty="0"/>
+              <a:t>Использование </a:t>
+            </a:r>
+            <a:r>
+              <a:rPr lang="en-US" dirty="0" err="1">
+                <a:latin typeface="Consolas" panose="020B0609020204030204" pitchFamily="49" charset="0"/>
+              </a:rPr>
+              <a:t>sizeof</a:t>
+            </a:r>
+            <a:r>
+              <a:rPr lang="en-US" dirty="0"/>
+              <a:t> </a:t>
+            </a:r>
+            <a:r>
+              <a:rPr lang="ru-RU" dirty="0" err="1"/>
+              <a:t>явл</a:t>
+            </a:r>
+            <a:r>
+              <a:rPr lang="ru-RU" dirty="0"/>
+              <a:t>. ошибкой</a:t>
+            </a:r>
+            <a:endParaRPr lang="en-US" dirty="0"/>
           </a:p>
           <a:p>
             <a:endParaRPr lang="ru-RU" dirty="0"/>
@@ -34353,7 +34567,7 @@
         </p:spPr>
         <p:txBody>
           <a:bodyPr>
-            <a:normAutofit fontScale="92500" lnSpcReduction="20000"/>
+            <a:normAutofit fontScale="92500" lnSpcReduction="10000"/>
           </a:bodyPr>
           <a:lstStyle/>
           <a:p>
@@ -34378,11 +34592,31 @@
                 <a:effectLst/>
                 <a:latin typeface="Consolas" panose="020B0609020204030204" pitchFamily="49" charset="0"/>
               </a:rPr>
-              <a:t> u = </a:t>
+              <a:t> </a:t>
             </a:r>
             <a:r>
               <a:rPr lang="en-US" sz="1800" b="0" dirty="0" err="1">
                 <a:solidFill>
+                  <a:srgbClr val="D4D4D4"/>
+                </a:solidFill>
+                <a:effectLst/>
+                <a:latin typeface="Consolas" panose="020B0609020204030204" pitchFamily="49" charset="0"/>
+              </a:rPr>
+              <a:t>hh</a:t>
+            </a:r>
+            <a:r>
+              <a:rPr lang="en-US" sz="1800" b="0" dirty="0">
+                <a:solidFill>
+                  <a:srgbClr val="D4D4D4"/>
+                </a:solidFill>
+                <a:effectLst/>
+                <a:latin typeface="Consolas" panose="020B0609020204030204" pitchFamily="49" charset="0"/>
+              </a:rPr>
+              <a:t> = </a:t>
+            </a:r>
+            <a:r>
+              <a:rPr lang="en-US" sz="1800" b="0" dirty="0" err="1">
+                <a:solidFill>
                   <a:srgbClr val="569CD6"/>
                 </a:solidFill>
                 <a:effectLst/>
@@ -34408,7 +34642,7 @@
                 <a:effectLst/>
                 <a:latin typeface="Consolas" panose="020B0609020204030204" pitchFamily="49" charset="0"/>
               </a:rPr>
-              <a:t>float</a:t>
+              <a:t>int</a:t>
             </a:r>
             <a:r>
               <a:rPr lang="en-US" sz="1800" b="0" dirty="0">
@@ -34418,7 +34652,7 @@
                 <a:effectLst/>
                 <a:latin typeface="Consolas" panose="020B0609020204030204" pitchFamily="49" charset="0"/>
               </a:rPr>
-              <a:t>(*)(</a:t>
+              <a:t>(</a:t>
             </a:r>
             <a:r>
               <a:rPr lang="en-US" sz="1800" b="0" dirty="0">
@@ -34428,7 +34662,7 @@
                 <a:effectLst/>
                 <a:latin typeface="Consolas" panose="020B0609020204030204" pitchFamily="49" charset="0"/>
               </a:rPr>
-              <a:t>float</a:t>
+              <a:t>int</a:t>
             </a:r>
             <a:r>
               <a:rPr lang="en-US" sz="1800" b="0" dirty="0">
@@ -34438,7 +34672,7 @@
                 <a:effectLst/>
                 <a:latin typeface="Consolas" panose="020B0609020204030204" pitchFamily="49" charset="0"/>
               </a:rPr>
-              <a:t>)), v = </a:t>
+              <a:t>)), h = </a:t>
             </a:r>
             <a:r>
               <a:rPr lang="en-US" sz="1800" b="0" dirty="0" err="1">
@@ -34468,7 +34702,7 @@
                 <a:effectLst/>
                 <a:latin typeface="Consolas" panose="020B0609020204030204" pitchFamily="49" charset="0"/>
               </a:rPr>
-              <a:t>float</a:t>
+              <a:t>void</a:t>
             </a:r>
             <a:r>
               <a:rPr lang="en-US" sz="1800" b="0" dirty="0">
@@ -34478,13 +34712,8 @@
                 <a:effectLst/>
                 <a:latin typeface="Consolas" panose="020B0609020204030204" pitchFamily="49" charset="0"/>
               </a:rPr>
-              <a:t>());</a:t>
-            </a:r>
-          </a:p>
-          <a:p>
-            <a:pPr marL="0" indent="0">
-              <a:buNone/>
-            </a:pPr>
+              <a:t>(</a:t>
+            </a:r>
             <a:r>
               <a:rPr lang="en-US" sz="1800" b="0" dirty="0">
                 <a:solidFill>
@@ -34503,7 +34732,7 @@
                 <a:effectLst/>
                 <a:latin typeface="Consolas" panose="020B0609020204030204" pitchFamily="49" charset="0"/>
               </a:rPr>
-              <a:t> w = </a:t>
+              <a:t>, ...)), bar = </a:t>
             </a:r>
             <a:r>
               <a:rPr lang="en-US" sz="1800" b="0" dirty="0" err="1">
@@ -34533,7 +34762,7 @@
                 <a:effectLst/>
                 <a:latin typeface="Consolas" panose="020B0609020204030204" pitchFamily="49" charset="0"/>
               </a:rPr>
-              <a:t>float</a:t>
+              <a:t>void</a:t>
             </a:r>
             <a:r>
               <a:rPr lang="en-US" sz="1800" b="0" dirty="0">
@@ -34543,87 +34772,27 @@
                 <a:effectLst/>
                 <a:latin typeface="Consolas" panose="020B0609020204030204" pitchFamily="49" charset="0"/>
               </a:rPr>
-              <a:t>(</a:t>
+              <a:t>()); </a:t>
+            </a:r>
+            <a:r>
+              <a:rPr lang="ru-RU" sz="1800" b="0" dirty="0">
+                <a:solidFill>
+                  <a:srgbClr val="6A9955"/>
+                </a:solidFill>
+                <a:effectLst/>
+                <a:latin typeface="Consolas" panose="020B0609020204030204" pitchFamily="49" charset="0"/>
+              </a:rPr>
+              <a:t>// </a:t>
             </a:r>
             <a:r>
               <a:rPr lang="en-US" sz="1800" b="0" dirty="0">
                 <a:solidFill>
-                  <a:srgbClr val="569CD6"/>
-                </a:solidFill>
-                <a:effectLst/>
-                <a:latin typeface="Consolas" panose="020B0609020204030204" pitchFamily="49" charset="0"/>
-              </a:rPr>
-              <a:t>double</a:t>
-            </a:r>
-            <a:r>
-              <a:rPr lang="en-US" sz="1800" b="0" dirty="0">
-                <a:solidFill>
                   <a:srgbClr val="D4D4D4"/>
                 </a:solidFill>
                 <a:effectLst/>
                 <a:latin typeface="Consolas" panose="020B0609020204030204" pitchFamily="49" charset="0"/>
               </a:rPr>
-              <a:t>(), </a:t>
-            </a:r>
-            <a:r>
-              <a:rPr lang="en-US" sz="1800" b="0" dirty="0">
-                <a:solidFill>
-                  <a:srgbClr val="569CD6"/>
-                </a:solidFill>
-                <a:effectLst/>
-                <a:latin typeface="Consolas" panose="020B0609020204030204" pitchFamily="49" charset="0"/>
-              </a:rPr>
-              <a:t>double</a:t>
-            </a:r>
-            <a:r>
-              <a:rPr lang="en-US" sz="1800" b="0" dirty="0">
-                <a:solidFill>
-                  <a:srgbClr val="D4D4D4"/>
-                </a:solidFill>
-                <a:effectLst/>
-                <a:latin typeface="Consolas" panose="020B0609020204030204" pitchFamily="49" charset="0"/>
-              </a:rPr>
-              <a:t>, </a:t>
-            </a:r>
-            <a:r>
-              <a:rPr lang="en-US" sz="1800" b="0" dirty="0">
-                <a:solidFill>
-                  <a:srgbClr val="569CD6"/>
-                </a:solidFill>
-                <a:effectLst/>
-                <a:latin typeface="Consolas" panose="020B0609020204030204" pitchFamily="49" charset="0"/>
-              </a:rPr>
-              <a:t>double</a:t>
-            </a:r>
-            <a:r>
-              <a:rPr lang="en-US" sz="1800" b="0" dirty="0">
-                <a:solidFill>
-                  <a:srgbClr val="D4D4D4"/>
-                </a:solidFill>
-                <a:effectLst/>
-                <a:latin typeface="Consolas" panose="020B0609020204030204" pitchFamily="49" charset="0"/>
-              </a:rPr>
-              <a:t>(</a:t>
-            </a:r>
-            <a:r>
-              <a:rPr lang="en-US" sz="1800" b="0" dirty="0">
-                <a:solidFill>
-                  <a:srgbClr val="569CD6"/>
-                </a:solidFill>
-                <a:effectLst/>
-                <a:latin typeface="Consolas" panose="020B0609020204030204" pitchFamily="49" charset="0"/>
-              </a:rPr>
-              <a:t>float</a:t>
-            </a:r>
-            <a:r>
-              <a:rPr lang="en-US" sz="1800" b="0" dirty="0">
-                <a:solidFill>
-                  <a:srgbClr val="D4D4D4"/>
-                </a:solidFill>
-                <a:effectLst/>
-                <a:latin typeface="Consolas" panose="020B0609020204030204" pitchFamily="49" charset="0"/>
-              </a:rPr>
-              <a:t>)));</a:t>
+              <a:t>😎</a:t>
             </a:r>
           </a:p>
           <a:p>
@@ -35170,6 +35339,26 @@
                 <a:latin typeface="Consolas" panose="020B0609020204030204" pitchFamily="49" charset="0"/>
               </a:rPr>
               <a:t>// </a:t>
+            </a:r>
+            <a:r>
+              <a:rPr lang="ru-RU" sz="1800" b="0" dirty="0" err="1">
+                <a:solidFill>
+                  <a:srgbClr val="6A9955"/>
+                </a:solidFill>
+                <a:effectLst/>
+                <a:latin typeface="Consolas" panose="020B0609020204030204" pitchFamily="49" charset="0"/>
+              </a:rPr>
+              <a:t>вариадическая</a:t>
+            </a:r>
+            <a:r>
+              <a:rPr lang="ru-RU" sz="1800" b="0" dirty="0">
+                <a:solidFill>
+                  <a:srgbClr val="6A9955"/>
+                </a:solidFill>
+                <a:effectLst/>
+                <a:latin typeface="Consolas" panose="020B0609020204030204" pitchFamily="49" charset="0"/>
+              </a:rPr>
+              <a:t> </a:t>
             </a:r>
             <a:r>
               <a:rPr lang="en-US" sz="1800" b="0" dirty="0">
@@ -36947,7 +37136,7 @@
           <a:p>
             <a:r>
               <a:rPr lang="ru-RU" dirty="0"/>
-              <a:t>Неполные структуры (объединения)</a:t>
+              <a:t>Неполная структура (объединение)</a:t>
             </a:r>
           </a:p>
         </p:txBody>
@@ -37330,7 +37519,7 @@
                 </a:solidFill>
                 <a:latin typeface="Consolas" panose="020B0609020204030204" pitchFamily="49" charset="0"/>
               </a:rPr>
-              <a:t>  // в т.ч. Неполного </a:t>
+              <a:t>  // в т.ч. неполного </a:t>
             </a:r>
             <a:r>
               <a:rPr lang="en-US" sz="2000" b="0" dirty="0">
@@ -37571,8 +37760,14 @@
               <a:t>По близости к математике: </a:t>
             </a:r>
             <a:r>
+              <a:rPr lang="en-US" dirty="0">
+                <a:latin typeface="Consolas" panose="020B0609020204030204" pitchFamily="49" charset="0"/>
+              </a:rPr>
+              <a:t>void</a:t>
+            </a:r>
+            <a:r>
               <a:rPr lang="en-US" dirty="0"/>
-              <a:t>void, </a:t>
+              <a:t>, </a:t>
             </a:r>
             <a:r>
               <a:rPr lang="ru-RU" dirty="0"/>
@@ -37586,8 +37781,14 @@
               <a:t>Нет строк, </a:t>
             </a:r>
             <a:r>
+              <a:rPr lang="en-US" dirty="0">
+                <a:latin typeface="Consolas" panose="020B0609020204030204" pitchFamily="49" charset="0"/>
+              </a:rPr>
+              <a:t>char</a:t>
+            </a:r>
+            <a:r>
               <a:rPr lang="en-US" dirty="0"/>
-              <a:t>char </a:t>
+              <a:t> </a:t>
             </a:r>
             <a:r>
               <a:rPr lang="ru-RU" dirty="0"/>
@@ -37602,8 +37803,14 @@
               <a:t>Размер </a:t>
             </a:r>
             <a:r>
+              <a:rPr lang="en-US" dirty="0">
+                <a:latin typeface="Consolas" panose="020B0609020204030204" pitchFamily="49" charset="0"/>
+              </a:rPr>
+              <a:t>struct</a:t>
+            </a:r>
+            <a:r>
               <a:rPr lang="en-US" dirty="0"/>
-              <a:t>struct </a:t>
+              <a:t> </a:t>
             </a:r>
             <a:r>
               <a:rPr lang="ru-RU" dirty="0" err="1"/>
@@ -37629,7 +37836,9 @@
               <a:t>Наличие знака у </a:t>
             </a:r>
             <a:r>
-              <a:rPr lang="en-US" dirty="0"/>
+              <a:rPr lang="en-US" dirty="0">
+                <a:latin typeface="Consolas" panose="020B0609020204030204" pitchFamily="49" charset="0"/>
+              </a:rPr>
               <a:t>char</a:t>
             </a:r>
             <a:r>
@@ -37646,15 +37855,21 @@
             <a:pPr lvl="2"/>
             <a:r>
               <a:rPr lang="ru-RU" dirty="0"/>
-              <a:t>Массив и указатель почти одно и то же</a:t>
+              <a:t>Массив и указатель – это почти одно и то же</a:t>
             </a:r>
             <a:endParaRPr lang="en-US" dirty="0"/>
           </a:p>
           <a:p>
             <a:pPr lvl="2"/>
             <a:r>
+              <a:rPr lang="en-US" dirty="0">
+                <a:latin typeface="Consolas" panose="020B0609020204030204" pitchFamily="49" charset="0"/>
+              </a:rPr>
+              <a:t>void fun()</a:t>
+            </a:r>
+            <a:r>
               <a:rPr lang="en-US" dirty="0"/>
-              <a:t>void f() </a:t>
+              <a:t> </a:t>
             </a:r>
             <a:r>
               <a:rPr lang="ru-RU" dirty="0"/>
@@ -37718,12 +37933,8 @@
           <a:lstStyle/>
           <a:p>
             <a:r>
-              <a:rPr lang="ru-RU"/>
-              <a:t>Типы языка </a:t>
-            </a:r>
-            <a:r>
               <a:rPr lang="ru-RU" dirty="0"/>
-              <a:t>Си</a:t>
+              <a:t>Типы языка Си</a:t>
             </a:r>
           </a:p>
         </p:txBody>
@@ -37762,12 +37973,16 @@
           <a:p>
             <a:pPr lvl="1"/>
             <a:r>
+              <a:rPr lang="ru-RU" sz="3600" dirty="0"/>
+              <a:t>Способ хранения значений в </a:t>
+            </a:r>
+            <a:r>
               <a:rPr lang="ru-RU" sz="3600" dirty="0">
                 <a:highlight>
-                  <a:srgbClr val="00FFFF"/>
+                  <a:srgbClr val="C0C0C0"/>
                 </a:highlight>
               </a:rPr>
-              <a:t>Способ хранения значений в памяти</a:t>
+              <a:t>памяти</a:t>
             </a:r>
           </a:p>
           <a:p>
@@ -37788,7 +38003,7 @@
             <a:pPr lvl="1"/>
             <a:r>
               <a:rPr lang="ru-RU" sz="3600" dirty="0"/>
-              <a:t>Список операций над значениями</a:t>
+              <a:t>Набор операций над значениями</a:t>
             </a:r>
           </a:p>
         </p:txBody>
@@ -37846,7 +38061,19 @@
           <a:p>
             <a:r>
               <a:rPr lang="ru-RU" dirty="0"/>
-              <a:t>Модель памяти программы</a:t>
+              <a:t>Модель </a:t>
+            </a:r>
+            <a:r>
+              <a:rPr lang="ru-RU" dirty="0">
+                <a:highlight>
+                  <a:srgbClr val="C0C0C0"/>
+                </a:highlight>
+              </a:rPr>
+              <a:t>памяти</a:t>
+            </a:r>
+            <a:r>
+              <a:rPr lang="ru-RU" dirty="0"/>
+              <a:t> программы</a:t>
             </a:r>
           </a:p>
         </p:txBody>
@@ -38307,7 +38534,19 @@
           <a:p>
             <a:r>
               <a:rPr lang="ru-RU" dirty="0"/>
-              <a:t>Модель памяти программы</a:t>
+              <a:t>Модель </a:t>
+            </a:r>
+            <a:r>
+              <a:rPr lang="ru-RU" dirty="0">
+                <a:highlight>
+                  <a:srgbClr val="C0C0C0"/>
+                </a:highlight>
+              </a:rPr>
+              <a:t>памяти</a:t>
+            </a:r>
+            <a:r>
+              <a:rPr lang="ru-RU" dirty="0"/>
+              <a:t> программы</a:t>
             </a:r>
           </a:p>
         </p:txBody>
@@ -38378,9 +38617,9 @@
             <a:pPr lvl="1"/>
             <a:r>
               <a:rPr lang="ru-RU" dirty="0">
-                <a:solidFill>
-                  <a:srgbClr val="00B050"/>
-                </a:solidFill>
+                <a:highlight>
+                  <a:srgbClr val="00FF00"/>
+                </a:highlight>
               </a:rPr>
               <a:t>Работа с памятью 100% автоматическая</a:t>
             </a:r>
@@ -38400,18 +38639,18 @@
             </a:r>
             <a:r>
               <a:rPr lang="ru-RU" dirty="0">
-                <a:solidFill>
-                  <a:srgbClr val="C00000"/>
-                </a:solidFill>
+                <a:highlight>
+                  <a:srgbClr val="FFFF00"/>
+                </a:highlight>
                 <a:latin typeface="Arial" panose="020B0604020202020204" pitchFamily="34" charset="0"/>
                 <a:cs typeface="Arial" panose="020B0604020202020204" pitchFamily="34" charset="0"/>
               </a:rPr>
               <a:t>▼</a:t>
             </a:r>
             <a:endParaRPr lang="ru-RU" dirty="0">
-              <a:solidFill>
-                <a:srgbClr val="C00000"/>
-              </a:solidFill>
+              <a:highlight>
+                <a:srgbClr val="FFFF00"/>
+              </a:highlight>
             </a:endParaRPr>
           </a:p>
           <a:p>
@@ -38422,18 +38661,18 @@
             </a:r>
             <a:r>
               <a:rPr lang="ru-RU" dirty="0">
-                <a:solidFill>
-                  <a:srgbClr val="C00000"/>
-                </a:solidFill>
+                <a:highlight>
+                  <a:srgbClr val="FFFF00"/>
+                </a:highlight>
                 <a:latin typeface="Arial" panose="020B0604020202020204" pitchFamily="34" charset="0"/>
                 <a:cs typeface="Arial" panose="020B0604020202020204" pitchFamily="34" charset="0"/>
               </a:rPr>
               <a:t>▲</a:t>
             </a:r>
             <a:endParaRPr lang="ru-RU" dirty="0">
-              <a:solidFill>
-                <a:srgbClr val="C00000"/>
-              </a:solidFill>
+              <a:highlight>
+                <a:srgbClr val="FFFF00"/>
+              </a:highlight>
             </a:endParaRPr>
           </a:p>
           <a:p>
@@ -38469,9 +38708,9 @@
             <a:pPr lvl="1"/>
             <a:r>
               <a:rPr lang="ru-RU" dirty="0">
-                <a:solidFill>
-                  <a:srgbClr val="C00000"/>
-                </a:solidFill>
+                <a:highlight>
+                  <a:srgbClr val="FFFF00"/>
+                </a:highlight>
               </a:rPr>
               <a:t>Работа с памятью полуавтоматическая</a:t>
             </a:r>
@@ -38499,9 +38738,9 @@
             </a:r>
             <a:r>
               <a:rPr lang="ru-RU" dirty="0">
-                <a:solidFill>
-                  <a:srgbClr val="00B050"/>
-                </a:solidFill>
+                <a:highlight>
+                  <a:srgbClr val="00FF00"/>
+                </a:highlight>
                 <a:latin typeface="Arial" panose="020B0604020202020204" pitchFamily="34" charset="0"/>
                 <a:cs typeface="Arial" panose="020B0604020202020204" pitchFamily="34" charset="0"/>
               </a:rPr>
@@ -38518,18 +38757,18 @@
             </a:r>
             <a:r>
               <a:rPr lang="ru-RU" dirty="0">
-                <a:solidFill>
-                  <a:srgbClr val="00B050"/>
-                </a:solidFill>
+                <a:highlight>
+                  <a:srgbClr val="00FF00"/>
+                </a:highlight>
                 <a:latin typeface="Arial" panose="020B0604020202020204" pitchFamily="34" charset="0"/>
                 <a:cs typeface="Arial" panose="020B0604020202020204" pitchFamily="34" charset="0"/>
               </a:rPr>
               <a:t>▼</a:t>
             </a:r>
             <a:endParaRPr lang="en-US" dirty="0">
-              <a:solidFill>
-                <a:srgbClr val="00B050"/>
-              </a:solidFill>
+              <a:highlight>
+                <a:srgbClr val="00FF00"/>
+              </a:highlight>
             </a:endParaRPr>
           </a:p>
           <a:p>

--- a/001 Типы языка Си.pptx
+++ b/001 Типы языка Си.pptx
@@ -253,7 +253,7 @@
           <a:p>
             <a:fld id="{8E55B237-282A-413C-93C7-161EFC0FDF85}" type="datetimeFigureOut">
               <a:rPr lang="ru-RU" smtClean="0"/>
-              <a:t>16.09.2026</a:t>
+              <a:t>21.09.2026</a:t>
             </a:fld>
             <a:endParaRPr lang="ru-RU"/>
           </a:p>
@@ -1006,7 +1006,7 @@
           <a:p>
             <a:fld id="{78E65DD7-7B4A-47A4-8B61-4938D03CC77B}" type="datetimeFigureOut">
               <a:rPr lang="ru-RU" smtClean="0"/>
-              <a:t>16.09.2026</a:t>
+              <a:t>21.09.2026</a:t>
             </a:fld>
             <a:endParaRPr lang="ru-RU"/>
           </a:p>
@@ -1206,7 +1206,7 @@
           <a:p>
             <a:fld id="{78E65DD7-7B4A-47A4-8B61-4938D03CC77B}" type="datetimeFigureOut">
               <a:rPr lang="ru-RU" smtClean="0"/>
-              <a:t>16.09.2026</a:t>
+              <a:t>21.09.2026</a:t>
             </a:fld>
             <a:endParaRPr lang="ru-RU"/>
           </a:p>
@@ -1416,7 +1416,7 @@
           <a:p>
             <a:fld id="{78E65DD7-7B4A-47A4-8B61-4938D03CC77B}" type="datetimeFigureOut">
               <a:rPr lang="ru-RU" smtClean="0"/>
-              <a:t>16.09.2026</a:t>
+              <a:t>21.09.2026</a:t>
             </a:fld>
             <a:endParaRPr lang="ru-RU"/>
           </a:p>
@@ -1616,7 +1616,7 @@
           <a:p>
             <a:fld id="{78E65DD7-7B4A-47A4-8B61-4938D03CC77B}" type="datetimeFigureOut">
               <a:rPr lang="ru-RU" smtClean="0"/>
-              <a:t>16.09.2026</a:t>
+              <a:t>21.09.2026</a:t>
             </a:fld>
             <a:endParaRPr lang="ru-RU"/>
           </a:p>
@@ -1892,7 +1892,7 @@
           <a:p>
             <a:fld id="{78E65DD7-7B4A-47A4-8B61-4938D03CC77B}" type="datetimeFigureOut">
               <a:rPr lang="ru-RU" smtClean="0"/>
-              <a:t>16.09.2026</a:t>
+              <a:t>21.09.2026</a:t>
             </a:fld>
             <a:endParaRPr lang="ru-RU"/>
           </a:p>
@@ -2160,7 +2160,7 @@
           <a:p>
             <a:fld id="{78E65DD7-7B4A-47A4-8B61-4938D03CC77B}" type="datetimeFigureOut">
               <a:rPr lang="ru-RU" smtClean="0"/>
-              <a:t>16.09.2026</a:t>
+              <a:t>21.09.2026</a:t>
             </a:fld>
             <a:endParaRPr lang="ru-RU"/>
           </a:p>
@@ -2575,7 +2575,7 @@
           <a:p>
             <a:fld id="{78E65DD7-7B4A-47A4-8B61-4938D03CC77B}" type="datetimeFigureOut">
               <a:rPr lang="ru-RU" smtClean="0"/>
-              <a:t>16.09.2026</a:t>
+              <a:t>21.09.2026</a:t>
             </a:fld>
             <a:endParaRPr lang="ru-RU"/>
           </a:p>
@@ -2717,7 +2717,7 @@
           <a:p>
             <a:fld id="{78E65DD7-7B4A-47A4-8B61-4938D03CC77B}" type="datetimeFigureOut">
               <a:rPr lang="ru-RU" smtClean="0"/>
-              <a:t>16.09.2026</a:t>
+              <a:t>21.09.2026</a:t>
             </a:fld>
             <a:endParaRPr lang="ru-RU"/>
           </a:p>
@@ -2830,7 +2830,7 @@
           <a:p>
             <a:fld id="{78E65DD7-7B4A-47A4-8B61-4938D03CC77B}" type="datetimeFigureOut">
               <a:rPr lang="ru-RU" smtClean="0"/>
-              <a:t>16.09.2026</a:t>
+              <a:t>21.09.2026</a:t>
             </a:fld>
             <a:endParaRPr lang="ru-RU"/>
           </a:p>
@@ -3143,7 +3143,7 @@
           <a:p>
             <a:fld id="{78E65DD7-7B4A-47A4-8B61-4938D03CC77B}" type="datetimeFigureOut">
               <a:rPr lang="ru-RU" smtClean="0"/>
-              <a:t>16.09.2026</a:t>
+              <a:t>21.09.2026</a:t>
             </a:fld>
             <a:endParaRPr lang="ru-RU"/>
           </a:p>
@@ -3432,7 +3432,7 @@
           <a:p>
             <a:fld id="{78E65DD7-7B4A-47A4-8B61-4938D03CC77B}" type="datetimeFigureOut">
               <a:rPr lang="ru-RU" smtClean="0"/>
-              <a:t>16.09.2026</a:t>
+              <a:t>21.09.2026</a:t>
             </a:fld>
             <a:endParaRPr lang="ru-RU"/>
           </a:p>
@@ -3675,7 +3675,7 @@
           <a:p>
             <a:fld id="{78E65DD7-7B4A-47A4-8B61-4938D03CC77B}" type="datetimeFigureOut">
               <a:rPr lang="ru-RU" smtClean="0"/>
-              <a:t>16.09.2026</a:t>
+              <a:t>21.09.2026</a:t>
             </a:fld>
             <a:endParaRPr lang="ru-RU"/>
           </a:p>
@@ -36065,8 +36065,8 @@
         </p:nvSpPr>
         <p:spPr>
           <a:xfrm>
-            <a:off x="6638306" y="2464130"/>
-            <a:ext cx="5123518" cy="1200329"/>
+            <a:off x="838200" y="3889169"/>
+            <a:ext cx="7874271" cy="2246769"/>
           </a:xfrm>
           <a:prstGeom prst="rect">
             <a:avLst/>
@@ -36084,7 +36084,7 @@
           </a:bodyPr>
           <a:lstStyle/>
           <a:p>
-            <a:endParaRPr lang="ru-RU" b="0" dirty="0">
+            <a:endParaRPr lang="ru-RU" sz="2800" b="0" dirty="0">
               <a:solidFill>
                 <a:srgbClr val="6A9955"/>
               </a:solidFill>
@@ -36094,7 +36094,7 @@
           </a:p>
           <a:p>
             <a:r>
-              <a:rPr lang="ru-RU" b="0" dirty="0">
+              <a:rPr lang="ru-RU" sz="2800" b="0" dirty="0">
                 <a:solidFill>
                   <a:srgbClr val="6A9955"/>
                 </a:solidFill>
@@ -36104,7 +36104,7 @@
               <a:t>// указатель на </a:t>
             </a:r>
             <a:r>
-              <a:rPr lang="ru-RU" b="0" dirty="0" err="1">
+              <a:rPr lang="ru-RU" sz="2800" b="0" dirty="0" err="1">
                 <a:solidFill>
                   <a:srgbClr val="6A9955"/>
                 </a:solidFill>
@@ -36114,7 +36114,7 @@
               <a:t>нетипизированные</a:t>
             </a:r>
             <a:r>
-              <a:rPr lang="ru-RU" b="0" dirty="0">
+              <a:rPr lang="ru-RU" sz="2800" b="0" dirty="0">
                 <a:solidFill>
                   <a:srgbClr val="6A9955"/>
                 </a:solidFill>
@@ -36123,17 +36123,46 @@
               </a:rPr>
               <a:t> данные</a:t>
             </a:r>
-            <a:endParaRPr lang="ru-RU" b="0" dirty="0">
-              <a:solidFill>
-                <a:srgbClr val="569CD6"/>
-              </a:solidFill>
+          </a:p>
+          <a:p>
+            <a:r>
+              <a:rPr lang="ru-RU" sz="2800" dirty="0">
+                <a:solidFill>
+                  <a:srgbClr val="6A9955"/>
+                </a:solidFill>
+                <a:latin typeface="Consolas" panose="020B0609020204030204" pitchFamily="49" charset="0"/>
+              </a:rPr>
+              <a:t>// </a:t>
+            </a:r>
+            <a:r>
+              <a:rPr lang="ru-RU" sz="2800" dirty="0" err="1">
+                <a:highlight>
+                  <a:srgbClr val="00FFFF"/>
+                </a:highlight>
+                <a:latin typeface="Consolas" panose="020B0609020204030204" pitchFamily="49" charset="0"/>
+              </a:rPr>
+              <a:t>нетипизированный</a:t>
+            </a:r>
+            <a:r>
+              <a:rPr lang="ru-RU" sz="2800" dirty="0">
+                <a:highlight>
+                  <a:srgbClr val="00FFFF"/>
+                </a:highlight>
+                <a:latin typeface="Consolas" panose="020B0609020204030204" pitchFamily="49" charset="0"/>
+              </a:rPr>
+              <a:t> указатель</a:t>
+            </a:r>
+            <a:endParaRPr lang="ru-RU" sz="2800" b="0" dirty="0">
               <a:effectLst/>
+              <a:highlight>
+                <a:srgbClr val="00FFFF"/>
+              </a:highlight>
               <a:latin typeface="Consolas" panose="020B0609020204030204" pitchFamily="49" charset="0"/>
             </a:endParaRPr>
           </a:p>
           <a:p>
             <a:r>
-              <a:rPr lang="ru-RU" b="0" dirty="0" err="1">
+              <a:rPr lang="ru-RU" sz="2800" b="0" dirty="0" err="1">
                 <a:solidFill>
                   <a:srgbClr val="569CD6"/>
                 </a:solidFill>
@@ -36143,7 +36172,7 @@
               <a:t>void</a:t>
             </a:r>
             <a:r>
-              <a:rPr lang="ru-RU" b="0" dirty="0">
+              <a:rPr lang="ru-RU" sz="2800" b="0" dirty="0">
                 <a:solidFill>
                   <a:srgbClr val="D4D4D4"/>
                 </a:solidFill>
@@ -36153,7 +36182,7 @@
               <a:t>* </a:t>
             </a:r>
             <a:r>
-              <a:rPr lang="ru-RU" b="0" dirty="0" err="1">
+              <a:rPr lang="ru-RU" sz="2800" b="0" dirty="0" err="1">
                 <a:solidFill>
                   <a:srgbClr val="D4D4D4"/>
                 </a:solidFill>
@@ -36163,7 +36192,7 @@
               <a:t>data</a:t>
             </a:r>
             <a:r>
-              <a:rPr lang="ru-RU" b="0" dirty="0">
+              <a:rPr lang="ru-RU" sz="2800" b="0" dirty="0">
                 <a:solidFill>
                   <a:srgbClr val="D4D4D4"/>
                 </a:solidFill>
@@ -36173,7 +36202,7 @@
               <a:t>;</a:t>
             </a:r>
             <a:r>
-              <a:rPr lang="ru-RU" b="0" dirty="0">
+              <a:rPr lang="ru-RU" sz="2800" b="0" dirty="0">
                 <a:solidFill>
                   <a:srgbClr val="6A9955"/>
                 </a:solidFill>
@@ -36182,7 +36211,7 @@
               </a:rPr>
               <a:t> </a:t>
             </a:r>
-            <a:endParaRPr lang="ru-RU" b="0" dirty="0">
+            <a:endParaRPr lang="ru-RU" sz="2800" b="0" dirty="0">
               <a:solidFill>
                 <a:srgbClr val="D4D4D4"/>
               </a:solidFill>
@@ -36191,7 +36220,7 @@
             </a:endParaRPr>
           </a:p>
           <a:p>
-            <a:endParaRPr lang="ru-RU" dirty="0"/>
+            <a:endParaRPr lang="ru-RU" sz="2800" dirty="0"/>
           </a:p>
         </p:txBody>
       </p:sp>

--- a/001 Типы языка Си.pptx
+++ b/001 Типы языка Си.pptx
@@ -253,7 +253,7 @@
           <a:p>
             <a:fld id="{8E55B237-282A-413C-93C7-161EFC0FDF85}" type="datetimeFigureOut">
               <a:rPr lang="ru-RU" smtClean="0"/>
-              <a:t>21.09.2026</a:t>
+              <a:t>22.09.2026</a:t>
             </a:fld>
             <a:endParaRPr lang="ru-RU"/>
           </a:p>
@@ -1006,7 +1006,7 @@
           <a:p>
             <a:fld id="{78E65DD7-7B4A-47A4-8B61-4938D03CC77B}" type="datetimeFigureOut">
               <a:rPr lang="ru-RU" smtClean="0"/>
-              <a:t>21.09.2026</a:t>
+              <a:t>22.09.2026</a:t>
             </a:fld>
             <a:endParaRPr lang="ru-RU"/>
           </a:p>
@@ -1206,7 +1206,7 @@
           <a:p>
             <a:fld id="{78E65DD7-7B4A-47A4-8B61-4938D03CC77B}" type="datetimeFigureOut">
               <a:rPr lang="ru-RU" smtClean="0"/>
-              <a:t>21.09.2026</a:t>
+              <a:t>22.09.2026</a:t>
             </a:fld>
             <a:endParaRPr lang="ru-RU"/>
           </a:p>
@@ -1416,7 +1416,7 @@
           <a:p>
             <a:fld id="{78E65DD7-7B4A-47A4-8B61-4938D03CC77B}" type="datetimeFigureOut">
               <a:rPr lang="ru-RU" smtClean="0"/>
-              <a:t>21.09.2026</a:t>
+              <a:t>22.09.2026</a:t>
             </a:fld>
             <a:endParaRPr lang="ru-RU"/>
           </a:p>
@@ -1616,7 +1616,7 @@
           <a:p>
             <a:fld id="{78E65DD7-7B4A-47A4-8B61-4938D03CC77B}" type="datetimeFigureOut">
               <a:rPr lang="ru-RU" smtClean="0"/>
-              <a:t>21.09.2026</a:t>
+              <a:t>22.09.2026</a:t>
             </a:fld>
             <a:endParaRPr lang="ru-RU"/>
           </a:p>
@@ -1892,7 +1892,7 @@
           <a:p>
             <a:fld id="{78E65DD7-7B4A-47A4-8B61-4938D03CC77B}" type="datetimeFigureOut">
               <a:rPr lang="ru-RU" smtClean="0"/>
-              <a:t>21.09.2026</a:t>
+              <a:t>22.09.2026</a:t>
             </a:fld>
             <a:endParaRPr lang="ru-RU"/>
           </a:p>
@@ -2160,7 +2160,7 @@
           <a:p>
             <a:fld id="{78E65DD7-7B4A-47A4-8B61-4938D03CC77B}" type="datetimeFigureOut">
               <a:rPr lang="ru-RU" smtClean="0"/>
-              <a:t>21.09.2026</a:t>
+              <a:t>22.09.2026</a:t>
             </a:fld>
             <a:endParaRPr lang="ru-RU"/>
           </a:p>
@@ -2575,7 +2575,7 @@
           <a:p>
             <a:fld id="{78E65DD7-7B4A-47A4-8B61-4938D03CC77B}" type="datetimeFigureOut">
               <a:rPr lang="ru-RU" smtClean="0"/>
-              <a:t>21.09.2026</a:t>
+              <a:t>22.09.2026</a:t>
             </a:fld>
             <a:endParaRPr lang="ru-RU"/>
           </a:p>
@@ -2717,7 +2717,7 @@
           <a:p>
             <a:fld id="{78E65DD7-7B4A-47A4-8B61-4938D03CC77B}" type="datetimeFigureOut">
               <a:rPr lang="ru-RU" smtClean="0"/>
-              <a:t>21.09.2026</a:t>
+              <a:t>22.09.2026</a:t>
             </a:fld>
             <a:endParaRPr lang="ru-RU"/>
           </a:p>
@@ -2830,7 +2830,7 @@
           <a:p>
             <a:fld id="{78E65DD7-7B4A-47A4-8B61-4938D03CC77B}" type="datetimeFigureOut">
               <a:rPr lang="ru-RU" smtClean="0"/>
-              <a:t>21.09.2026</a:t>
+              <a:t>22.09.2026</a:t>
             </a:fld>
             <a:endParaRPr lang="ru-RU"/>
           </a:p>
@@ -3143,7 +3143,7 @@
           <a:p>
             <a:fld id="{78E65DD7-7B4A-47A4-8B61-4938D03CC77B}" type="datetimeFigureOut">
               <a:rPr lang="ru-RU" smtClean="0"/>
-              <a:t>21.09.2026</a:t>
+              <a:t>22.09.2026</a:t>
             </a:fld>
             <a:endParaRPr lang="ru-RU"/>
           </a:p>
@@ -3432,7 +3432,7 @@
           <a:p>
             <a:fld id="{78E65DD7-7B4A-47A4-8B61-4938D03CC77B}" type="datetimeFigureOut">
               <a:rPr lang="ru-RU" smtClean="0"/>
-              <a:t>21.09.2026</a:t>
+              <a:t>22.09.2026</a:t>
             </a:fld>
             <a:endParaRPr lang="ru-RU"/>
           </a:p>
@@ -3675,7 +3675,7 @@
           <a:p>
             <a:fld id="{78E65DD7-7B4A-47A4-8B61-4938D03CC77B}" type="datetimeFigureOut">
               <a:rPr lang="ru-RU" smtClean="0"/>
-              <a:t>21.09.2026</a:t>
+              <a:t>22.09.2026</a:t>
             </a:fld>
             <a:endParaRPr lang="ru-RU"/>
           </a:p>
